--- a/examples/education/out/deck.pptx
+++ b/examples/education/out/deck.pptx
@@ -4284,7 +4284,7 @@
             <a:avLst/>
           </a:prstGeom>
           <a:solidFill>
-            <a:srgbClr val="EFE8E5"/>
+            <a:srgbClr val="ECE4E1"/>
           </a:solidFill>
           <a:ln>
             <a:noFill/>
@@ -4375,7 +4375,7 @@
             <a:r>
               <a:rPr sz="1700" b="0">
                 <a:solidFill>
-                  <a:srgbClr val="9B8B83"/>
+                  <a:srgbClr val="87736A"/>
                 </a:solidFill>
                 <a:latin typeface="微软雅黑"/>
                 <a:ea typeface="微软雅黑"/>
@@ -4438,7 +4438,7 @@
             <a:r>
               <a:rPr sz="1700" b="0">
                 <a:solidFill>
-                  <a:srgbClr val="9B8B83"/>
+                  <a:srgbClr val="87736A"/>
                 </a:solidFill>
                 <a:latin typeface="微软雅黑"/>
                 <a:ea typeface="微软雅黑"/>
@@ -4501,7 +4501,7 @@
             <a:r>
               <a:rPr sz="1700" b="0">
                 <a:solidFill>
-                  <a:srgbClr val="9B8B83"/>
+                  <a:srgbClr val="87736A"/>
                 </a:solidFill>
                 <a:latin typeface="微软雅黑"/>
                 <a:ea typeface="微软雅黑"/>
@@ -5028,42 +5028,6 @@
           </a:p>
         </p:txBody>
       </p:sp>
-      <p:sp>
-        <p:nvSpPr>
-          <p:cNvPr id="5" name="TextBox 4"/>
-          <p:cNvSpPr txBox="1"/>
-          <p:nvPr/>
-        </p:nvSpPr>
-        <p:spPr>
-          <a:xfrm>
-            <a:off x="822960" y="3886200"/>
-            <a:ext cx="8229600" cy="457200"/>
-          </a:xfrm>
-          <a:prstGeom prst="rect">
-            <a:avLst/>
-          </a:prstGeom>
-          <a:noFill/>
-        </p:spPr>
-        <p:txBody>
-          <a:bodyPr wrap="square" anchor="t">
-            <a:spAutoFit/>
-          </a:bodyPr>
-          <a:lstStyle/>
-          <a:p>
-            <a:pPr algn="l"/>
-            <a:r>
-              <a:rPr sz="1800" b="0">
-                <a:solidFill>
-                  <a:srgbClr val="FFE6D3"/>
-                </a:solidFill>
-                <a:latin typeface="微软雅黑"/>
-                <a:ea typeface="微软雅黑"/>
-              </a:rPr>
-              <a:t>这一章你会学到什么</a:t>
-            </a:r>
-          </a:p>
-        </p:txBody>
-      </p:sp>
     </p:spTree>
   </p:cSld>
   <p:clrMapOvr>
@@ -6151,42 +6115,6 @@
           </a:p>
         </p:txBody>
       </p:sp>
-      <p:sp>
-        <p:nvSpPr>
-          <p:cNvPr id="5" name="TextBox 4"/>
-          <p:cNvSpPr txBox="1"/>
-          <p:nvPr/>
-        </p:nvSpPr>
-        <p:spPr>
-          <a:xfrm>
-            <a:off x="822960" y="3886200"/>
-            <a:ext cx="8229600" cy="457200"/>
-          </a:xfrm>
-          <a:prstGeom prst="rect">
-            <a:avLst/>
-          </a:prstGeom>
-          <a:noFill/>
-        </p:spPr>
-        <p:txBody>
-          <a:bodyPr wrap="square" anchor="t">
-            <a:spAutoFit/>
-          </a:bodyPr>
-          <a:lstStyle/>
-          <a:p>
-            <a:pPr algn="l"/>
-            <a:r>
-              <a:rPr sz="1800" b="0">
-                <a:solidFill>
-                  <a:srgbClr val="FFE6D3"/>
-                </a:solidFill>
-                <a:latin typeface="微软雅黑"/>
-                <a:ea typeface="微软雅黑"/>
-              </a:rPr>
-              <a:t>这一章你会学到什么</a:t>
-            </a:r>
-          </a:p>
-        </p:txBody>
-      </p:sp>
     </p:spTree>
   </p:cSld>
   <p:clrMapOvr>
@@ -8262,42 +8190,6 @@
           </a:p>
         </p:txBody>
       </p:sp>
-      <p:sp>
-        <p:nvSpPr>
-          <p:cNvPr id="5" name="TextBox 4"/>
-          <p:cNvSpPr txBox="1"/>
-          <p:nvPr/>
-        </p:nvSpPr>
-        <p:spPr>
-          <a:xfrm>
-            <a:off x="822960" y="3886200"/>
-            <a:ext cx="8229600" cy="457200"/>
-          </a:xfrm>
-          <a:prstGeom prst="rect">
-            <a:avLst/>
-          </a:prstGeom>
-          <a:noFill/>
-        </p:spPr>
-        <p:txBody>
-          <a:bodyPr wrap="square" anchor="t">
-            <a:spAutoFit/>
-          </a:bodyPr>
-          <a:lstStyle/>
-          <a:p>
-            <a:pPr algn="l"/>
-            <a:r>
-              <a:rPr sz="1800" b="0">
-                <a:solidFill>
-                  <a:srgbClr val="FFE6D3"/>
-                </a:solidFill>
-                <a:latin typeface="微软雅黑"/>
-                <a:ea typeface="微软雅黑"/>
-              </a:rPr>
-              <a:t>这一章你会学到什么</a:t>
-            </a:r>
-          </a:p>
-        </p:txBody>
-      </p:sp>
     </p:spTree>
   </p:cSld>
   <p:clrMapOvr>
@@ -10796,42 +10688,6 @@
           </a:p>
         </p:txBody>
       </p:sp>
-      <p:sp>
-        <p:nvSpPr>
-          <p:cNvPr id="5" name="TextBox 4"/>
-          <p:cNvSpPr txBox="1"/>
-          <p:nvPr/>
-        </p:nvSpPr>
-        <p:spPr>
-          <a:xfrm>
-            <a:off x="822960" y="3886200"/>
-            <a:ext cx="8229600" cy="457200"/>
-          </a:xfrm>
-          <a:prstGeom prst="rect">
-            <a:avLst/>
-          </a:prstGeom>
-          <a:noFill/>
-        </p:spPr>
-        <p:txBody>
-          <a:bodyPr wrap="square" anchor="t">
-            <a:spAutoFit/>
-          </a:bodyPr>
-          <a:lstStyle/>
-          <a:p>
-            <a:pPr algn="l"/>
-            <a:r>
-              <a:rPr sz="1800" b="0">
-                <a:solidFill>
-                  <a:srgbClr val="FFE6D3"/>
-                </a:solidFill>
-                <a:latin typeface="微软雅黑"/>
-                <a:ea typeface="微软雅黑"/>
-              </a:rPr>
-              <a:t>这一章你会学到什么</a:t>
-            </a:r>
-          </a:p>
-        </p:txBody>
-      </p:sp>
     </p:spTree>
   </p:cSld>
   <p:clrMapOvr>
@@ -11098,7 +10954,7 @@
             <a:r>
               <a:rPr sz="1000" b="0">
                 <a:solidFill>
-                  <a:srgbClr val="9B8B83"/>
+                  <a:srgbClr val="87736A"/>
                 </a:solidFill>
                 <a:latin typeface="微软雅黑"/>
                 <a:ea typeface="微软雅黑"/>
@@ -11261,7 +11117,7 @@
             <a:r>
               <a:rPr sz="1800" b="0">
                 <a:solidFill>
-                  <a:srgbClr val="9B8B83"/>
+                  <a:srgbClr val="87736A"/>
                 </a:solidFill>
                 <a:latin typeface="微软雅黑"/>
                 <a:ea typeface="微软雅黑"/>
@@ -11424,7 +11280,7 @@
             <a:r>
               <a:rPr sz="1800" b="0">
                 <a:solidFill>
-                  <a:srgbClr val="9B8B83"/>
+                  <a:srgbClr val="87736A"/>
                 </a:solidFill>
                 <a:latin typeface="微软雅黑"/>
                 <a:ea typeface="微软雅黑"/>
@@ -11622,7 +11478,7 @@
             <a:r>
               <a:rPr sz="1800" b="0">
                 <a:solidFill>
-                  <a:srgbClr val="9B8B83"/>
+                  <a:srgbClr val="87736A"/>
                 </a:solidFill>
                 <a:latin typeface="微软雅黑"/>
                 <a:ea typeface="微软雅黑"/>
